--- a/Final-Deliverables/Presentation/P06-SA.pptx
+++ b/Final-Deliverables/Presentation/P06-SA.pptx
@@ -3640,8 +3640,8 @@
         </p:nvSpPr>
         <p:spPr>
           <a:xfrm flipH="false" flipV="false" rot="0">
-            <a:off x="3920872" y="1150620"/>
-            <a:ext cx="10446256" cy="12510486"/>
+            <a:off x="4163708" y="1150620"/>
+            <a:ext cx="9960584" cy="12335089"/>
           </a:xfrm>
           <a:custGeom>
             <a:avLst/>
@@ -3650,18 +3650,18 @@
             <a:cxnLst/>
             <a:rect r="r" b="b" t="t" l="l"/>
             <a:pathLst>
-              <a:path h="12510486" w="10446256">
+              <a:path h="12335089" w="9960584">
                 <a:moveTo>
                   <a:pt x="0" y="0"/>
                 </a:moveTo>
                 <a:lnTo>
-                  <a:pt x="10446256" y="0"/>
+                  <a:pt x="9960584" y="0"/>
                 </a:lnTo>
                 <a:lnTo>
-                  <a:pt x="10446256" y="12510486"/>
+                  <a:pt x="9960584" y="12335089"/>
                 </a:lnTo>
                 <a:lnTo>
-                  <a:pt x="0" y="12510486"/>
+                  <a:pt x="0" y="12335089"/>
                 </a:lnTo>
                 <a:lnTo>
                   <a:pt x="0" y="0"/>
